--- a/Project_Files/Presentations/Progress on the FPGA Implementation project.pptx
+++ b/Project_Files/Presentations/Progress on the FPGA Implementation project.pptx
@@ -14,8 +14,9 @@
     <p:sldId id="261" r:id="rId8"/>
     <p:sldId id="262" r:id="rId9"/>
     <p:sldId id="263" r:id="rId10"/>
-    <p:sldId id="266" r:id="rId11"/>
-    <p:sldId id="265" r:id="rId12"/>
+    <p:sldId id="267" r:id="rId11"/>
+    <p:sldId id="266" r:id="rId12"/>
+    <p:sldId id="265" r:id="rId13"/>
   </p:sldIdLst>
   <p:sldSz cx="12192000" cy="6858000"/>
   <p:notesSz cx="6858000" cy="9144000"/>
@@ -271,7 +272,7 @@
           <a:p>
             <a:fld id="{315C717F-B076-4CA4-9411-100B8B95BDE6}" type="datetimeFigureOut">
               <a:rPr lang="en-IN" smtClean="0"/>
-              <a:t>10-03-2026</a:t>
+              <a:t>17-04-2026</a:t>
             </a:fld>
             <a:endParaRPr lang="en-IN"/>
           </a:p>
@@ -471,7 +472,7 @@
           <a:p>
             <a:fld id="{315C717F-B076-4CA4-9411-100B8B95BDE6}" type="datetimeFigureOut">
               <a:rPr lang="en-IN" smtClean="0"/>
-              <a:t>10-03-2026</a:t>
+              <a:t>17-04-2026</a:t>
             </a:fld>
             <a:endParaRPr lang="en-IN"/>
           </a:p>
@@ -681,7 +682,7 @@
           <a:p>
             <a:fld id="{315C717F-B076-4CA4-9411-100B8B95BDE6}" type="datetimeFigureOut">
               <a:rPr lang="en-IN" smtClean="0"/>
-              <a:t>10-03-2026</a:t>
+              <a:t>17-04-2026</a:t>
             </a:fld>
             <a:endParaRPr lang="en-IN"/>
           </a:p>
@@ -881,7 +882,7 @@
           <a:p>
             <a:fld id="{315C717F-B076-4CA4-9411-100B8B95BDE6}" type="datetimeFigureOut">
               <a:rPr lang="en-IN" smtClean="0"/>
-              <a:t>10-03-2026</a:t>
+              <a:t>17-04-2026</a:t>
             </a:fld>
             <a:endParaRPr lang="en-IN"/>
           </a:p>
@@ -1157,7 +1158,7 @@
           <a:p>
             <a:fld id="{315C717F-B076-4CA4-9411-100B8B95BDE6}" type="datetimeFigureOut">
               <a:rPr lang="en-IN" smtClean="0"/>
-              <a:t>10-03-2026</a:t>
+              <a:t>17-04-2026</a:t>
             </a:fld>
             <a:endParaRPr lang="en-IN"/>
           </a:p>
@@ -1425,7 +1426,7 @@
           <a:p>
             <a:fld id="{315C717F-B076-4CA4-9411-100B8B95BDE6}" type="datetimeFigureOut">
               <a:rPr lang="en-IN" smtClean="0"/>
-              <a:t>10-03-2026</a:t>
+              <a:t>17-04-2026</a:t>
             </a:fld>
             <a:endParaRPr lang="en-IN"/>
           </a:p>
@@ -1840,7 +1841,7 @@
           <a:p>
             <a:fld id="{315C717F-B076-4CA4-9411-100B8B95BDE6}" type="datetimeFigureOut">
               <a:rPr lang="en-IN" smtClean="0"/>
-              <a:t>10-03-2026</a:t>
+              <a:t>17-04-2026</a:t>
             </a:fld>
             <a:endParaRPr lang="en-IN"/>
           </a:p>
@@ -1982,7 +1983,7 @@
           <a:p>
             <a:fld id="{315C717F-B076-4CA4-9411-100B8B95BDE6}" type="datetimeFigureOut">
               <a:rPr lang="en-IN" smtClean="0"/>
-              <a:t>10-03-2026</a:t>
+              <a:t>17-04-2026</a:t>
             </a:fld>
             <a:endParaRPr lang="en-IN"/>
           </a:p>
@@ -2095,7 +2096,7 @@
           <a:p>
             <a:fld id="{315C717F-B076-4CA4-9411-100B8B95BDE6}" type="datetimeFigureOut">
               <a:rPr lang="en-IN" smtClean="0"/>
-              <a:t>10-03-2026</a:t>
+              <a:t>17-04-2026</a:t>
             </a:fld>
             <a:endParaRPr lang="en-IN"/>
           </a:p>
@@ -2408,7 +2409,7 @@
           <a:p>
             <a:fld id="{315C717F-B076-4CA4-9411-100B8B95BDE6}" type="datetimeFigureOut">
               <a:rPr lang="en-IN" smtClean="0"/>
-              <a:t>10-03-2026</a:t>
+              <a:t>17-04-2026</a:t>
             </a:fld>
             <a:endParaRPr lang="en-IN"/>
           </a:p>
@@ -2697,7 +2698,7 @@
           <a:p>
             <a:fld id="{315C717F-B076-4CA4-9411-100B8B95BDE6}" type="datetimeFigureOut">
               <a:rPr lang="en-IN" smtClean="0"/>
-              <a:t>10-03-2026</a:t>
+              <a:t>17-04-2026</a:t>
             </a:fld>
             <a:endParaRPr lang="en-IN"/>
           </a:p>
@@ -2940,7 +2941,7 @@
           <a:p>
             <a:fld id="{315C717F-B076-4CA4-9411-100B8B95BDE6}" type="datetimeFigureOut">
               <a:rPr lang="en-IN" smtClean="0"/>
-              <a:t>10-03-2026</a:t>
+              <a:t>17-04-2026</a:t>
             </a:fld>
             <a:endParaRPr lang="en-IN"/>
           </a:p>
@@ -3448,6 +3449,165 @@
           <p:cNvPr id="2" name="Title 1">
             <a:extLst>
               <a:ext uri="{FF2B5EF4-FFF2-40B4-BE49-F238E27FC236}">
+                <a16:creationId xmlns:a16="http://schemas.microsoft.com/office/drawing/2014/main" id="{B879CE5F-4568-5DB3-F824-C50CE4BC917E}"/>
+              </a:ext>
+            </a:extLst>
+          </p:cNvPr>
+          <p:cNvSpPr>
+            <a:spLocks noGrp="1"/>
+          </p:cNvSpPr>
+          <p:nvPr>
+            <p:ph type="title"/>
+          </p:nvPr>
+        </p:nvSpPr>
+        <p:spPr/>
+        <p:txBody>
+          <a:bodyPr/>
+          <a:lstStyle/>
+          <a:p>
+            <a:pPr algn="ctr"/>
+            <a:r>
+              <a:rPr lang="en-US" b="1" dirty="0"/>
+              <a:t>Beamforming Synthesis</a:t>
+            </a:r>
+            <a:br>
+              <a:rPr lang="en-US" b="1" dirty="0"/>
+            </a:br>
+            <a:endParaRPr lang="en-IN" b="1" dirty="0"/>
+          </a:p>
+        </p:txBody>
+      </p:sp>
+      <p:pic>
+        <p:nvPicPr>
+          <p:cNvPr id="1026" name="Picture 2">
+            <a:extLst>
+              <a:ext uri="{FF2B5EF4-FFF2-40B4-BE49-F238E27FC236}">
+                <a16:creationId xmlns:a16="http://schemas.microsoft.com/office/drawing/2014/main" id="{0C7A34CB-FE86-3DAD-621A-2AF7684AF40E}"/>
+              </a:ext>
+            </a:extLst>
+          </p:cNvPr>
+          <p:cNvPicPr>
+            <a:picLocks noGrp="1" noChangeAspect="1" noChangeArrowheads="1"/>
+          </p:cNvPicPr>
+          <p:nvPr>
+            <p:ph idx="1"/>
+          </p:nvPr>
+        </p:nvPicPr>
+        <p:blipFill>
+          <a:blip r:embed="rId2">
+            <a:extLst>
+              <a:ext uri="{28A0092B-C50C-407E-A947-70E740481C1C}">
+                <a14:useLocalDpi xmlns:a14="http://schemas.microsoft.com/office/drawing/2010/main" val="0"/>
+              </a:ext>
+            </a:extLst>
+          </a:blip>
+          <a:srcRect/>
+          <a:stretch>
+            <a:fillRect/>
+          </a:stretch>
+        </p:blipFill>
+        <p:spPr bwMode="auto">
+          <a:xfrm>
+            <a:off x="838200" y="5309668"/>
+            <a:ext cx="10515600" cy="850022"/>
+          </a:xfrm>
+          <a:prstGeom prst="rect">
+            <a:avLst/>
+          </a:prstGeom>
+          <a:noFill/>
+          <a:extLst>
+            <a:ext uri="{909E8E84-426E-40DD-AFC4-6F175D3DCCD1}">
+              <a14:hiddenFill xmlns:a14="http://schemas.microsoft.com/office/drawing/2010/main">
+                <a:solidFill>
+                  <a:srgbClr val="FFFFFF"/>
+                </a:solidFill>
+              </a14:hiddenFill>
+            </a:ext>
+          </a:extLst>
+        </p:spPr>
+      </p:pic>
+      <p:pic>
+        <p:nvPicPr>
+          <p:cNvPr id="1038" name="Picture 14">
+            <a:extLst>
+              <a:ext uri="{FF2B5EF4-FFF2-40B4-BE49-F238E27FC236}">
+                <a16:creationId xmlns:a16="http://schemas.microsoft.com/office/drawing/2014/main" id="{CEEE7105-8D97-9326-89F4-38ED4C7DC955}"/>
+              </a:ext>
+            </a:extLst>
+          </p:cNvPr>
+          <p:cNvPicPr>
+            <a:picLocks noChangeAspect="1" noChangeArrowheads="1"/>
+          </p:cNvPicPr>
+          <p:nvPr/>
+        </p:nvPicPr>
+        <p:blipFill>
+          <a:blip r:embed="rId3">
+            <a:extLst>
+              <a:ext uri="{28A0092B-C50C-407E-A947-70E740481C1C}">
+                <a14:useLocalDpi xmlns:a14="http://schemas.microsoft.com/office/drawing/2010/main" val="0"/>
+              </a:ext>
+            </a:extLst>
+          </a:blip>
+          <a:srcRect/>
+          <a:stretch>
+            <a:fillRect/>
+          </a:stretch>
+        </p:blipFill>
+        <p:spPr bwMode="auto">
+          <a:xfrm>
+            <a:off x="2625256" y="2010246"/>
+            <a:ext cx="6941487" cy="3159267"/>
+          </a:xfrm>
+          <a:prstGeom prst="rect">
+            <a:avLst/>
+          </a:prstGeom>
+          <a:noFill/>
+          <a:extLst>
+            <a:ext uri="{909E8E84-426E-40DD-AFC4-6F175D3DCCD1}">
+              <a14:hiddenFill xmlns:a14="http://schemas.microsoft.com/office/drawing/2010/main">
+                <a:solidFill>
+                  <a:srgbClr val="FFFFFF"/>
+                </a:solidFill>
+              </a14:hiddenFill>
+            </a:ext>
+          </a:extLst>
+        </p:spPr>
+      </p:pic>
+    </p:spTree>
+    <p:extLst>
+      <p:ext uri="{BB962C8B-B14F-4D97-AF65-F5344CB8AC3E}">
+        <p14:creationId xmlns:p14="http://schemas.microsoft.com/office/powerpoint/2010/main" val="1108476848"/>
+      </p:ext>
+    </p:extLst>
+  </p:cSld>
+  <p:clrMapOvr>
+    <a:masterClrMapping/>
+  </p:clrMapOvr>
+</p:sld>
+</file>
+
+<file path=ppt/slides/slide11.xml><?xml version="1.0" encoding="utf-8"?>
+<p:sld xmlns:a="http://schemas.openxmlformats.org/drawingml/2006/main" xmlns:r="http://schemas.openxmlformats.org/officeDocument/2006/relationships" xmlns:p="http://schemas.openxmlformats.org/presentationml/2006/main">
+  <p:cSld>
+    <p:spTree>
+      <p:nvGrpSpPr>
+        <p:cNvPr id="1" name=""/>
+        <p:cNvGrpSpPr/>
+        <p:nvPr/>
+      </p:nvGrpSpPr>
+      <p:grpSpPr>
+        <a:xfrm>
+          <a:off x="0" y="0"/>
+          <a:ext cx="0" cy="0"/>
+          <a:chOff x="0" y="0"/>
+          <a:chExt cx="0" cy="0"/>
+        </a:xfrm>
+      </p:grpSpPr>
+      <p:sp>
+        <p:nvSpPr>
+          <p:cNvPr id="2" name="Title 1">
+            <a:extLst>
+              <a:ext uri="{FF2B5EF4-FFF2-40B4-BE49-F238E27FC236}">
                 <a16:creationId xmlns:a16="http://schemas.microsoft.com/office/drawing/2014/main" id="{7E724F1C-E191-F85B-161F-F07160DDA7FD}"/>
               </a:ext>
             </a:extLst>
@@ -3492,12 +3652,6 @@
         <p:txBody>
           <a:bodyPr/>
           <a:lstStyle/>
-          <a:p>
-            <a:r>
-              <a:rPr lang="en-IN" dirty="0"/>
-              <a:t>Rigorous testing and implementation of the beamforming function.</a:t>
-            </a:r>
-          </a:p>
           <a:p>
             <a:r>
               <a:rPr lang="en-IN" dirty="0"/>
@@ -3534,7 +3688,7 @@
 </p:sld>
 </file>
 
-<file path=ppt/slides/slide11.xml><?xml version="1.0" encoding="utf-8"?>
+<file path=ppt/slides/slide12.xml><?xml version="1.0" encoding="utf-8"?>
 <p:sld xmlns:a="http://schemas.openxmlformats.org/drawingml/2006/main" xmlns:r="http://schemas.openxmlformats.org/officeDocument/2006/relationships" xmlns:p="http://schemas.openxmlformats.org/presentationml/2006/main">
   <p:cSld>
     <p:spTree>
@@ -4901,21 +5055,118 @@
             <p:ph idx="1"/>
           </p:nvPr>
         </p:nvSpPr>
-        <p:spPr/>
-        <p:txBody>
-          <a:bodyPr/>
-          <a:lstStyle/>
-          <a:p>
-            <a:r>
-              <a:rPr lang="en-IN" dirty="0"/>
-              <a:t>As for the beamforming function, I have to still test that to ensure it works properly, but I have finished writing the main skeleton of the code, as well as the co-ordinate generator and the top level controller.</a:t>
-            </a:r>
-          </a:p>
-          <a:p>
+        <p:spPr>
+          <a:xfrm>
+            <a:off x="838200" y="1825625"/>
+            <a:ext cx="10515600" cy="1148163"/>
+          </a:xfrm>
+        </p:spPr>
+        <p:txBody>
+          <a:bodyPr/>
+          <a:lstStyle/>
+          <a:p>
+            <a:r>
+              <a:rPr lang="en-IN" sz="1600" dirty="0"/>
+              <a:t>The Beamforming function produces 50 RF addresses and goes to retrieve sampled data from each of these addresses. This sampled data is then used to calculate the final pixel brightness of each pixel. It instantiates a Delay calculator to find the RF addresses, using the square root for distance calculations. The simulation results are shown below. Implementation was also successful, shown on the next slide.</a:t>
+            </a:r>
             <a:endParaRPr lang="en-IN" dirty="0"/>
           </a:p>
         </p:txBody>
       </p:sp>
+      <p:pic>
+        <p:nvPicPr>
+          <p:cNvPr id="1034" name="Picture 10">
+            <a:extLst>
+              <a:ext uri="{FF2B5EF4-FFF2-40B4-BE49-F238E27FC236}">
+                <a16:creationId xmlns:a16="http://schemas.microsoft.com/office/drawing/2014/main" id="{6CE14AD4-263F-7EEB-4D27-A154988C541D}"/>
+              </a:ext>
+            </a:extLst>
+          </p:cNvPr>
+          <p:cNvPicPr>
+            <a:picLocks noChangeAspect="1" noChangeArrowheads="1"/>
+          </p:cNvPicPr>
+          <p:nvPr/>
+        </p:nvPicPr>
+        <p:blipFill>
+          <a:blip r:embed="rId2">
+            <a:extLst>
+              <a:ext uri="{28A0092B-C50C-407E-A947-70E740481C1C}">
+                <a14:useLocalDpi xmlns:a14="http://schemas.microsoft.com/office/drawing/2010/main" val="0"/>
+              </a:ext>
+            </a:extLst>
+          </a:blip>
+          <a:srcRect/>
+          <a:stretch>
+            <a:fillRect/>
+          </a:stretch>
+        </p:blipFill>
+        <p:spPr bwMode="auto">
+          <a:xfrm>
+            <a:off x="611589" y="2873529"/>
+            <a:ext cx="4879817" cy="2557212"/>
+          </a:xfrm>
+          <a:prstGeom prst="rect">
+            <a:avLst/>
+          </a:prstGeom>
+          <a:noFill/>
+          <a:extLst>
+            <a:ext uri="{909E8E84-426E-40DD-AFC4-6F175D3DCCD1}">
+              <a14:hiddenFill xmlns:a14="http://schemas.microsoft.com/office/drawing/2010/main">
+                <a:solidFill>
+                  <a:srgbClr val="FFFFFF"/>
+                </a:solidFill>
+              </a14:hiddenFill>
+            </a:ext>
+          </a:extLst>
+        </p:spPr>
+      </p:pic>
+      <p:pic>
+        <p:nvPicPr>
+          <p:cNvPr id="1036" name="Picture 12">
+            <a:extLst>
+              <a:ext uri="{FF2B5EF4-FFF2-40B4-BE49-F238E27FC236}">
+                <a16:creationId xmlns:a16="http://schemas.microsoft.com/office/drawing/2014/main" id="{95A80287-2D14-E4A9-419A-429EB863F2AE}"/>
+              </a:ext>
+            </a:extLst>
+          </p:cNvPr>
+          <p:cNvPicPr>
+            <a:picLocks noChangeAspect="1" noChangeArrowheads="1"/>
+          </p:cNvPicPr>
+          <p:nvPr/>
+        </p:nvPicPr>
+        <p:blipFill>
+          <a:blip r:embed="rId3">
+            <a:extLst>
+              <a:ext uri="{28A0092B-C50C-407E-A947-70E740481C1C}">
+                <a14:useLocalDpi xmlns:a14="http://schemas.microsoft.com/office/drawing/2010/main" val="0"/>
+              </a:ext>
+            </a:extLst>
+          </a:blip>
+          <a:srcRect/>
+          <a:stretch>
+            <a:fillRect/>
+          </a:stretch>
+        </p:blipFill>
+        <p:spPr bwMode="auto">
+          <a:xfrm>
+            <a:off x="5491406" y="2873529"/>
+            <a:ext cx="1778040" cy="3348390"/>
+          </a:xfrm>
+          <a:prstGeom prst="rect">
+            <a:avLst/>
+          </a:prstGeom>
+          <a:noFill/>
+          <a:extLst>
+            <a:ext uri="{909E8E84-426E-40DD-AFC4-6F175D3DCCD1}">
+              <a14:hiddenFill xmlns:a14="http://schemas.microsoft.com/office/drawing/2010/main">
+                <a:solidFill>
+                  <a:srgbClr val="FFFFFF"/>
+                </a:solidFill>
+              </a14:hiddenFill>
+            </a:ext>
+          </a:extLst>
+        </p:spPr>
+      </p:pic>
     </p:spTree>
     <p:extLst>
       <p:ext uri="{BB962C8B-B14F-4D97-AF65-F5344CB8AC3E}">
